--- a/mon/toan/slide/lop10/Slide_TOAN10_BaiTapCuoiChuong3_T22.pptx
+++ b/mon/toan/slide/lop10/Slide_TOAN10_BaiTapCuoiChuong3_T22.pptx
@@ -4200,7 +4200,7 @@
                 </a:solidFill>
                 <a:latin typeface="Calibri"/>
               </a:rPr>
-              <a:t>GV soạn: Trương Tử Trang – Trường THPT Vĩnh Thạnh</a:t>
+              <a:t>GV soạn: TTT – Trường THPT</a:t>
             </a:r>
           </a:p>
         </p:txBody>
@@ -22635,50 +22635,6 @@
       <p:grpSpPr/>
       <p:sp>
         <p:nvSpPr>
-          <p:cNvPr id="2" name="Rectangle 1"/>
-          <p:cNvSpPr/>
-          <p:nvPr/>
-        </p:nvSpPr>
-        <p:spPr>
-          <a:xfrm>
-            <a:off x="457200" y="384048"/>
-            <a:ext cx="109728" cy="658368"/>
-          </a:xfrm>
-          <a:prstGeom prst="rect">
-            <a:avLst/>
-          </a:prstGeom>
-          <a:solidFill>
-            <a:srgbClr val="1E40AF"/>
-          </a:solidFill>
-          <a:ln>
-            <a:noFill/>
-          </a:ln>
-          <a:effectLst/>
-        </p:spPr>
-        <p:style>
-          <a:lnRef idx="1">
-            <a:schemeClr val="accent1"/>
-          </a:lnRef>
-          <a:fillRef idx="3">
-            <a:schemeClr val="accent1"/>
-          </a:fillRef>
-          <a:effectRef idx="2">
-            <a:schemeClr val="accent1"/>
-          </a:effectRef>
-          <a:fontRef idx="minor">
-            <a:schemeClr val="lt1"/>
-          </a:fontRef>
-        </p:style>
-        <p:txBody>
-          <a:bodyPr rtlCol="0" anchor="ctr"/>
-          <a:lstStyle/>
-          <a:p>
-            <a:pPr algn="ctr"/>
-          </a:p>
-        </p:txBody>
-      </p:sp>
-      <p:sp>
-        <p:nvSpPr>
           <p:cNvPr id="3" name="TextBox 2"/>
           <p:cNvSpPr txBox="1"/>
           <p:nvPr/>
@@ -22790,65 +22746,1713 @@
           </a:p>
         </p:txBody>
       </p:sp>
-      <p:pic>
-        <p:nvPicPr>
-          <p:cNvPr id="6" name="Picture 5" descr="img02.png"/>
-          <p:cNvPicPr>
-            <a:picLocks noChangeAspect="1"/>
-          </p:cNvPicPr>
+      <p:cxnSp>
+        <p:nvCxnSpPr>
+          <p:cNvPr id="6" name="Connector 5"/>
+          <p:cNvCxnSpPr/>
           <p:nvPr/>
-        </p:nvPicPr>
-        <p:blipFill>
-          <a:blip r:embed="rId2"/>
-          <a:stretch>
-            <a:fillRect/>
-          </a:stretch>
-        </p:blipFill>
+        </p:nvCxnSpPr>
         <p:spPr>
-          <a:xfrm>
-            <a:off x="2193266" y="1417320"/>
-            <a:ext cx="7774988" cy="4343400"/>
+          <a:xfrm flipH="1" flipV="1">
+            <a:off x="4338888" y="2670962"/>
+            <a:ext cx="1688379" cy="1283818"/>
           </a:xfrm>
-          <a:prstGeom prst="rect">
+          <a:prstGeom prst="line">
             <a:avLst/>
           </a:prstGeom>
+          <a:ln w="44450">
+            <a:solidFill>
+              <a:srgbClr val="548235"/>
+            </a:solidFill>
+          </a:ln>
         </p:spPr>
-      </p:pic>
+        <p:style>
+          <a:lnRef idx="2">
+            <a:schemeClr val="accent1"/>
+          </a:lnRef>
+          <a:fillRef idx="0">
+            <a:schemeClr val="accent1"/>
+          </a:fillRef>
+          <a:effectRef idx="1">
+            <a:schemeClr val="accent1"/>
+          </a:effectRef>
+          <a:fontRef idx="minor">
+            <a:schemeClr val="tx1"/>
+          </a:fontRef>
+        </p:style>
+      </p:cxnSp>
+      <p:cxnSp>
+        <p:nvCxnSpPr>
+          <p:cNvPr id="7" name="Connector 6"/>
+          <p:cNvCxnSpPr/>
+          <p:nvPr/>
+        </p:nvCxnSpPr>
+        <p:spPr>
+          <a:xfrm flipH="1" flipV="1">
+            <a:off x="2593073" y="1931116"/>
+            <a:ext cx="1745815" cy="739846"/>
+          </a:xfrm>
+          <a:prstGeom prst="line">
+            <a:avLst/>
+          </a:prstGeom>
+          <a:ln w="15875">
+            <a:solidFill>
+              <a:srgbClr val="548235"/>
+            </a:solidFill>
+          </a:ln>
+        </p:spPr>
+        <p:style>
+          <a:lnRef idx="2">
+            <a:schemeClr val="accent1"/>
+          </a:lnRef>
+          <a:fillRef idx="0">
+            <a:schemeClr val="accent1"/>
+          </a:fillRef>
+          <a:effectRef idx="1">
+            <a:schemeClr val="accent1"/>
+          </a:effectRef>
+          <a:fontRef idx="minor">
+            <a:schemeClr val="tx1"/>
+          </a:fontRef>
+        </p:style>
+      </p:cxnSp>
       <p:sp>
         <p:nvSpPr>
-          <p:cNvPr id="7" name="TextBox 6"/>
-          <p:cNvSpPr txBox="1"/>
+          <p:cNvPr id="8" name="Rounded Rectangle 7"/>
+          <p:cNvSpPr/>
           <p:nvPr/>
         </p:nvSpPr>
         <p:spPr>
           <a:xfrm>
-            <a:off x="731520" y="5806440"/>
-            <a:ext cx="10698480" cy="457200"/>
+            <a:off x="1019568" y="1654804"/>
+            <a:ext cx="1573505" cy="552622"/>
           </a:xfrm>
-          <a:prstGeom prst="rect">
-            <a:avLst/>
+          <a:prstGeom prst="roundRect">
+            <a:avLst>
+              <a:gd name="adj" fmla="val 50000"/>
+            </a:avLst>
           </a:prstGeom>
-          <a:noFill/>
+          <a:solidFill>
+            <a:srgbClr val="EDF5E8"/>
+          </a:solidFill>
+          <a:ln w="15875">
+            <a:solidFill>
+              <a:srgbClr val="548235"/>
+            </a:solidFill>
+          </a:ln>
+          <a:effectLst/>
         </p:spPr>
+        <p:style>
+          <a:lnRef idx="1">
+            <a:schemeClr val="accent1"/>
+          </a:lnRef>
+          <a:fillRef idx="3">
+            <a:schemeClr val="accent1"/>
+          </a:fillRef>
+          <a:effectRef idx="2">
+            <a:schemeClr val="accent1"/>
+          </a:effectRef>
+          <a:fontRef idx="minor">
+            <a:schemeClr val="lt1"/>
+          </a:fontRef>
+        </p:style>
         <p:txBody>
-          <a:bodyPr wrap="square" anchor="t" lIns="45720" rIns="45720">
-            <a:spAutoFit/>
-          </a:bodyPr>
+          <a:bodyPr rtlCol="0" anchor="ctr" wrap="none" lIns="64000" rIns="64000" tIns="25400" bIns="25400"/>
           <a:lstStyle/>
           <a:p>
-            <a:pPr algn="ctr">
-              <a:spcAft>
-                <a:spcPts val="800"/>
-              </a:spcAft>
-            </a:pPr>
+            <a:pPr algn="ctr"/>
             <a:r>
-              <a:rPr sz="2000" b="1">
+              <a:rPr sz="1300" b="0">
                 <a:solidFill>
-                  <a:srgbClr val="1E40AF"/>
+                  <a:srgbClr val="000000"/>
                 </a:solidFill>
                 <a:latin typeface="Calibri"/>
               </a:rPr>
-              <a:t>Nêu nội dung từng nhánh trước khi GV hiện đáp án</a:t>
+              <a:t>sin²α + cos²α =</a:t>
+            </a:r>
+          </a:p>
+          <a:p>
+            <a:pPr algn="ctr"/>
+            <a:r>
+              <a:rPr sz="1300" b="0">
+                <a:solidFill>
+                  <a:srgbClr val="000000"/>
+                </a:solidFill>
+                <a:latin typeface="Calibri"/>
+              </a:rPr>
+              <a:t>1</a:t>
+            </a:r>
+          </a:p>
+        </p:txBody>
+      </p:sp>
+      <p:cxnSp>
+        <p:nvCxnSpPr>
+          <p:cNvPr id="9" name="Connector 8"/>
+          <p:cNvCxnSpPr/>
+          <p:nvPr/>
+        </p:nvCxnSpPr>
+        <p:spPr>
+          <a:xfrm flipH="1" flipV="1">
+            <a:off x="2721851" y="2457917"/>
+            <a:ext cx="1617037" cy="213045"/>
+          </a:xfrm>
+          <a:prstGeom prst="line">
+            <a:avLst/>
+          </a:prstGeom>
+          <a:ln w="15875">
+            <a:solidFill>
+              <a:srgbClr val="548235"/>
+            </a:solidFill>
+          </a:ln>
+        </p:spPr>
+        <p:style>
+          <a:lnRef idx="2">
+            <a:schemeClr val="accent1"/>
+          </a:lnRef>
+          <a:fillRef idx="0">
+            <a:schemeClr val="accent1"/>
+          </a:fillRef>
+          <a:effectRef idx="1">
+            <a:schemeClr val="accent1"/>
+          </a:effectRef>
+          <a:fontRef idx="minor">
+            <a:schemeClr val="tx1"/>
+          </a:fontRef>
+        </p:style>
+      </p:cxnSp>
+      <p:sp>
+        <p:nvSpPr>
+          <p:cNvPr id="10" name="Rounded Rectangle 9"/>
+          <p:cNvSpPr/>
+          <p:nvPr/>
+        </p:nvSpPr>
+        <p:spPr>
+          <a:xfrm>
+            <a:off x="890790" y="2282317"/>
+            <a:ext cx="1831061" cy="351200"/>
+          </a:xfrm>
+          <a:prstGeom prst="roundRect">
+            <a:avLst>
+              <a:gd name="adj" fmla="val 50000"/>
+            </a:avLst>
+          </a:prstGeom>
+          <a:solidFill>
+            <a:srgbClr val="EDF5E8"/>
+          </a:solidFill>
+          <a:ln w="15875">
+            <a:solidFill>
+              <a:srgbClr val="548235"/>
+            </a:solidFill>
+          </a:ln>
+          <a:effectLst/>
+        </p:spPr>
+        <p:style>
+          <a:lnRef idx="1">
+            <a:schemeClr val="accent1"/>
+          </a:lnRef>
+          <a:fillRef idx="3">
+            <a:schemeClr val="accent1"/>
+          </a:fillRef>
+          <a:effectRef idx="2">
+            <a:schemeClr val="accent1"/>
+          </a:effectRef>
+          <a:fontRef idx="minor">
+            <a:schemeClr val="lt1"/>
+          </a:fontRef>
+        </p:style>
+        <p:txBody>
+          <a:bodyPr rtlCol="0" anchor="ctr" wrap="none" lIns="64000" rIns="64000" tIns="25400" bIns="25400"/>
+          <a:lstStyle/>
+          <a:p>
+            <a:pPr algn="ctr"/>
+            <a:r>
+              <a:rPr sz="1300" b="0">
+                <a:solidFill>
+                  <a:srgbClr val="000000"/>
+                </a:solidFill>
+                <a:latin typeface="Calibri"/>
+              </a:rPr>
+              <a:t>sin(180°–α) = sinα</a:t>
+            </a:r>
+          </a:p>
+        </p:txBody>
+      </p:sp>
+      <p:cxnSp>
+        <p:nvCxnSpPr>
+          <p:cNvPr id="11" name="Connector 10"/>
+          <p:cNvCxnSpPr/>
+          <p:nvPr/>
+        </p:nvCxnSpPr>
+        <p:spPr>
+          <a:xfrm flipH="1">
+            <a:off x="2764777" y="2670962"/>
+            <a:ext cx="1574111" cy="213045"/>
+          </a:xfrm>
+          <a:prstGeom prst="line">
+            <a:avLst/>
+          </a:prstGeom>
+          <a:ln w="15875">
+            <a:solidFill>
+              <a:srgbClr val="548235"/>
+            </a:solidFill>
+          </a:ln>
+        </p:spPr>
+        <p:style>
+          <a:lnRef idx="2">
+            <a:schemeClr val="accent1"/>
+          </a:lnRef>
+          <a:fillRef idx="0">
+            <a:schemeClr val="accent1"/>
+          </a:fillRef>
+          <a:effectRef idx="1">
+            <a:schemeClr val="accent1"/>
+          </a:effectRef>
+          <a:fontRef idx="minor">
+            <a:schemeClr val="tx1"/>
+          </a:fontRef>
+        </p:style>
+      </p:cxnSp>
+      <p:sp>
+        <p:nvSpPr>
+          <p:cNvPr id="12" name="Rounded Rectangle 11"/>
+          <p:cNvSpPr/>
+          <p:nvPr/>
+        </p:nvSpPr>
+        <p:spPr>
+          <a:xfrm>
+            <a:off x="847864" y="2708407"/>
+            <a:ext cx="1916913" cy="351200"/>
+          </a:xfrm>
+          <a:prstGeom prst="roundRect">
+            <a:avLst>
+              <a:gd name="adj" fmla="val 50000"/>
+            </a:avLst>
+          </a:prstGeom>
+          <a:solidFill>
+            <a:srgbClr val="EDF5E8"/>
+          </a:solidFill>
+          <a:ln w="15875">
+            <a:solidFill>
+              <a:srgbClr val="548235"/>
+            </a:solidFill>
+          </a:ln>
+          <a:effectLst/>
+        </p:spPr>
+        <p:style>
+          <a:lnRef idx="1">
+            <a:schemeClr val="accent1"/>
+          </a:lnRef>
+          <a:fillRef idx="3">
+            <a:schemeClr val="accent1"/>
+          </a:fillRef>
+          <a:effectRef idx="2">
+            <a:schemeClr val="accent1"/>
+          </a:effectRef>
+          <a:fontRef idx="minor">
+            <a:schemeClr val="lt1"/>
+          </a:fontRef>
+        </p:style>
+        <p:txBody>
+          <a:bodyPr rtlCol="0" anchor="ctr" wrap="none" lIns="64000" rIns="64000" tIns="25400" bIns="25400"/>
+          <a:lstStyle/>
+          <a:p>
+            <a:pPr algn="ctr"/>
+            <a:r>
+              <a:rPr sz="1300" b="0">
+                <a:solidFill>
+                  <a:srgbClr val="000000"/>
+                </a:solidFill>
+                <a:latin typeface="Calibri"/>
+              </a:rPr>
+              <a:t>cos(180°–α) = –cosα</a:t>
+            </a:r>
+          </a:p>
+        </p:txBody>
+      </p:sp>
+      <p:cxnSp>
+        <p:nvCxnSpPr>
+          <p:cNvPr id="13" name="Connector 12"/>
+          <p:cNvCxnSpPr/>
+          <p:nvPr/>
+        </p:nvCxnSpPr>
+        <p:spPr>
+          <a:xfrm flipH="1">
+            <a:off x="2764777" y="2670962"/>
+            <a:ext cx="1574111" cy="739846"/>
+          </a:xfrm>
+          <a:prstGeom prst="line">
+            <a:avLst/>
+          </a:prstGeom>
+          <a:ln w="15875">
+            <a:solidFill>
+              <a:srgbClr val="548235"/>
+            </a:solidFill>
+          </a:ln>
+        </p:spPr>
+        <p:style>
+          <a:lnRef idx="2">
+            <a:schemeClr val="accent1"/>
+          </a:lnRef>
+          <a:fillRef idx="0">
+            <a:schemeClr val="accent1"/>
+          </a:fillRef>
+          <a:effectRef idx="1">
+            <a:schemeClr val="accent1"/>
+          </a:effectRef>
+          <a:fontRef idx="minor">
+            <a:schemeClr val="tx1"/>
+          </a:fontRef>
+        </p:style>
+      </p:cxnSp>
+      <p:sp>
+        <p:nvSpPr>
+          <p:cNvPr id="14" name="Rounded Rectangle 13"/>
+          <p:cNvSpPr/>
+          <p:nvPr/>
+        </p:nvSpPr>
+        <p:spPr>
+          <a:xfrm>
+            <a:off x="847864" y="3134497"/>
+            <a:ext cx="1916913" cy="552622"/>
+          </a:xfrm>
+          <a:prstGeom prst="roundRect">
+            <a:avLst>
+              <a:gd name="adj" fmla="val 50000"/>
+            </a:avLst>
+          </a:prstGeom>
+          <a:solidFill>
+            <a:srgbClr val="EDF5E8"/>
+          </a:solidFill>
+          <a:ln w="15875">
+            <a:solidFill>
+              <a:srgbClr val="548235"/>
+            </a:solidFill>
+          </a:ln>
+          <a:effectLst/>
+        </p:spPr>
+        <p:style>
+          <a:lnRef idx="1">
+            <a:schemeClr val="accent1"/>
+          </a:lnRef>
+          <a:fillRef idx="3">
+            <a:schemeClr val="accent1"/>
+          </a:fillRef>
+          <a:effectRef idx="2">
+            <a:schemeClr val="accent1"/>
+          </a:effectRef>
+          <a:fontRef idx="minor">
+            <a:schemeClr val="lt1"/>
+          </a:fontRef>
+        </p:style>
+        <p:txBody>
+          <a:bodyPr rtlCol="0" anchor="ctr" wrap="none" lIns="64000" rIns="64000" tIns="25400" bIns="25400"/>
+          <a:lstStyle/>
+          <a:p>
+            <a:pPr algn="ctr"/>
+            <a:r>
+              <a:rPr sz="1300" b="0">
+                <a:solidFill>
+                  <a:srgbClr val="000000"/>
+                </a:solidFill>
+                <a:latin typeface="Calibri"/>
+              </a:rPr>
+              <a:t>Bảng 30°, 45°, 60°,</a:t>
+            </a:r>
+          </a:p>
+          <a:p>
+            <a:pPr algn="ctr"/>
+            <a:r>
+              <a:rPr sz="1300" b="0">
+                <a:solidFill>
+                  <a:srgbClr val="000000"/>
+                </a:solidFill>
+                <a:latin typeface="Calibri"/>
+              </a:rPr>
+              <a:t>120°, 135°, 150°</a:t>
+            </a:r>
+          </a:p>
+        </p:txBody>
+      </p:sp>
+      <p:sp>
+        <p:nvSpPr>
+          <p:cNvPr id="15" name="Oval 14"/>
+          <p:cNvSpPr/>
+          <p:nvPr/>
+        </p:nvSpPr>
+        <p:spPr>
+          <a:xfrm>
+            <a:off x="3363922" y="1922084"/>
+            <a:ext cx="1949933" cy="1497756"/>
+          </a:xfrm>
+          <a:prstGeom prst="ellipse">
+            <a:avLst/>
+          </a:prstGeom>
+          <a:solidFill>
+            <a:srgbClr val="E2EFDA"/>
+          </a:solidFill>
+          <a:ln w="31750">
+            <a:solidFill>
+              <a:srgbClr val="375623"/>
+            </a:solidFill>
+          </a:ln>
+          <a:effectLst/>
+        </p:spPr>
+        <p:style>
+          <a:lnRef idx="1">
+            <a:schemeClr val="accent1"/>
+          </a:lnRef>
+          <a:fillRef idx="3">
+            <a:schemeClr val="accent1"/>
+          </a:fillRef>
+          <a:effectRef idx="2">
+            <a:schemeClr val="accent1"/>
+          </a:effectRef>
+          <a:fontRef idx="minor">
+            <a:schemeClr val="lt1"/>
+          </a:fontRef>
+        </p:style>
+        <p:txBody>
+          <a:bodyPr rtlCol="0" anchor="ctr" wrap="none" lIns="64000" rIns="64000" tIns="25400" bIns="25400"/>
+          <a:lstStyle/>
+          <a:p>
+            <a:pPr algn="ctr"/>
+            <a:r>
+              <a:rPr sz="1500" b="1">
+                <a:solidFill>
+                  <a:srgbClr val="000000"/>
+                </a:solidFill>
+                <a:latin typeface="Calibri"/>
+              </a:rPr>
+              <a:t>Góc từ 0°</a:t>
+            </a:r>
+          </a:p>
+          <a:p>
+            <a:pPr algn="ctr"/>
+            <a:r>
+              <a:rPr sz="1500" b="1">
+                <a:solidFill>
+                  <a:srgbClr val="000000"/>
+                </a:solidFill>
+                <a:latin typeface="Calibri"/>
+              </a:rPr>
+              <a:t>đến 180° Giá</a:t>
+            </a:r>
+          </a:p>
+          <a:p>
+            <a:pPr algn="ctr"/>
+            <a:r>
+              <a:rPr sz="1500" b="1">
+                <a:solidFill>
+                  <a:srgbClr val="000000"/>
+                </a:solidFill>
+                <a:latin typeface="Calibri"/>
+              </a:rPr>
+              <a:t>trị LG đặc</a:t>
+            </a:r>
+          </a:p>
+          <a:p>
+            <a:pPr algn="ctr"/>
+            <a:r>
+              <a:rPr sz="1500" b="1">
+                <a:solidFill>
+                  <a:srgbClr val="000000"/>
+                </a:solidFill>
+                <a:latin typeface="Calibri"/>
+              </a:rPr>
+              <a:t>biệt</a:t>
+            </a:r>
+          </a:p>
+        </p:txBody>
+      </p:sp>
+      <p:cxnSp>
+        <p:nvCxnSpPr>
+          <p:cNvPr id="16" name="Connector 15"/>
+          <p:cNvCxnSpPr/>
+          <p:nvPr/>
+        </p:nvCxnSpPr>
+        <p:spPr>
+          <a:xfrm flipV="1">
+            <a:off x="6027267" y="2670962"/>
+            <a:ext cx="1688379" cy="1283818"/>
+          </a:xfrm>
+          <a:prstGeom prst="line">
+            <a:avLst/>
+          </a:prstGeom>
+          <a:ln w="44450">
+            <a:solidFill>
+              <a:srgbClr val="BF8F00"/>
+            </a:solidFill>
+          </a:ln>
+        </p:spPr>
+        <p:style>
+          <a:lnRef idx="2">
+            <a:schemeClr val="accent1"/>
+          </a:lnRef>
+          <a:fillRef idx="0">
+            <a:schemeClr val="accent1"/>
+          </a:fillRef>
+          <a:effectRef idx="1">
+            <a:schemeClr val="accent1"/>
+          </a:effectRef>
+          <a:fontRef idx="minor">
+            <a:schemeClr val="tx1"/>
+          </a:fontRef>
+        </p:style>
+      </p:cxnSp>
+      <p:cxnSp>
+        <p:nvCxnSpPr>
+          <p:cNvPr id="17" name="Connector 16"/>
+          <p:cNvCxnSpPr/>
+          <p:nvPr/>
+        </p:nvCxnSpPr>
+        <p:spPr>
+          <a:xfrm flipV="1">
+            <a:off x="7715646" y="2244872"/>
+            <a:ext cx="1659963" cy="426090"/>
+          </a:xfrm>
+          <a:prstGeom prst="line">
+            <a:avLst/>
+          </a:prstGeom>
+          <a:ln w="15875">
+            <a:solidFill>
+              <a:srgbClr val="BF8F00"/>
+            </a:solidFill>
+          </a:ln>
+        </p:spPr>
+        <p:style>
+          <a:lnRef idx="2">
+            <a:schemeClr val="accent1"/>
+          </a:lnRef>
+          <a:fillRef idx="0">
+            <a:schemeClr val="accent1"/>
+          </a:fillRef>
+          <a:effectRef idx="1">
+            <a:schemeClr val="accent1"/>
+          </a:effectRef>
+          <a:fontRef idx="minor">
+            <a:schemeClr val="tx1"/>
+          </a:fontRef>
+        </p:style>
+      </p:cxnSp>
+      <p:sp>
+        <p:nvSpPr>
+          <p:cNvPr id="18" name="Rounded Rectangle 17"/>
+          <p:cNvSpPr/>
+          <p:nvPr/>
+        </p:nvSpPr>
+        <p:spPr>
+          <a:xfrm>
+            <a:off x="9375609" y="1968560"/>
+            <a:ext cx="1745209" cy="552622"/>
+          </a:xfrm>
+          <a:prstGeom prst="roundRect">
+            <a:avLst>
+              <a:gd name="adj" fmla="val 50000"/>
+            </a:avLst>
+          </a:prstGeom>
+          <a:solidFill>
+            <a:srgbClr val="FFF8E1"/>
+          </a:solidFill>
+          <a:ln w="15875">
+            <a:solidFill>
+              <a:srgbClr val="BF8F00"/>
+            </a:solidFill>
+          </a:ln>
+          <a:effectLst/>
+        </p:spPr>
+        <p:style>
+          <a:lnRef idx="1">
+            <a:schemeClr val="accent1"/>
+          </a:lnRef>
+          <a:fillRef idx="3">
+            <a:schemeClr val="accent1"/>
+          </a:fillRef>
+          <a:effectRef idx="2">
+            <a:schemeClr val="accent1"/>
+          </a:effectRef>
+          <a:fontRef idx="minor">
+            <a:schemeClr val="lt1"/>
+          </a:fontRef>
+        </p:style>
+        <p:txBody>
+          <a:bodyPr rtlCol="0" anchor="ctr" wrap="none" lIns="64000" rIns="64000" tIns="25400" bIns="25400"/>
+          <a:lstStyle/>
+          <a:p>
+            <a:pPr algn="ctr"/>
+            <a:r>
+              <a:rPr sz="1300" b="0">
+                <a:solidFill>
+                  <a:srgbClr val="000000"/>
+                </a:solidFill>
+                <a:latin typeface="Calibri"/>
+              </a:rPr>
+              <a:t>a/sinA = b/sinB =</a:t>
+            </a:r>
+          </a:p>
+          <a:p>
+            <a:pPr algn="ctr"/>
+            <a:r>
+              <a:rPr sz="1300" b="0">
+                <a:solidFill>
+                  <a:srgbClr val="000000"/>
+                </a:solidFill>
+                <a:latin typeface="Calibri"/>
+              </a:rPr>
+              <a:t>c/sinC = 2R</a:t>
+            </a:r>
+          </a:p>
+        </p:txBody>
+      </p:sp>
+      <p:cxnSp>
+        <p:nvCxnSpPr>
+          <p:cNvPr id="19" name="Connector 18"/>
+          <p:cNvCxnSpPr/>
+          <p:nvPr/>
+        </p:nvCxnSpPr>
+        <p:spPr>
+          <a:xfrm>
+            <a:off x="7715646" y="2670962"/>
+            <a:ext cx="1574111" cy="100711"/>
+          </a:xfrm>
+          <a:prstGeom prst="line">
+            <a:avLst/>
+          </a:prstGeom>
+          <a:ln w="15875">
+            <a:solidFill>
+              <a:srgbClr val="BF8F00"/>
+            </a:solidFill>
+          </a:ln>
+        </p:spPr>
+        <p:style>
+          <a:lnRef idx="2">
+            <a:schemeClr val="accent1"/>
+          </a:lnRef>
+          <a:fillRef idx="0">
+            <a:schemeClr val="accent1"/>
+          </a:fillRef>
+          <a:effectRef idx="1">
+            <a:schemeClr val="accent1"/>
+          </a:effectRef>
+          <a:fontRef idx="minor">
+            <a:schemeClr val="tx1"/>
+          </a:fontRef>
+        </p:style>
+      </p:cxnSp>
+      <p:sp>
+        <p:nvSpPr>
+          <p:cNvPr id="20" name="Rounded Rectangle 19"/>
+          <p:cNvSpPr/>
+          <p:nvPr/>
+        </p:nvSpPr>
+        <p:spPr>
+          <a:xfrm>
+            <a:off x="9289757" y="2596073"/>
+            <a:ext cx="1916913" cy="351200"/>
+          </a:xfrm>
+          <a:prstGeom prst="roundRect">
+            <a:avLst>
+              <a:gd name="adj" fmla="val 50000"/>
+            </a:avLst>
+          </a:prstGeom>
+          <a:solidFill>
+            <a:srgbClr val="FFF8E1"/>
+          </a:solidFill>
+          <a:ln w="15875">
+            <a:solidFill>
+              <a:srgbClr val="BF8F00"/>
+            </a:solidFill>
+          </a:ln>
+          <a:effectLst/>
+        </p:spPr>
+        <p:style>
+          <a:lnRef idx="1">
+            <a:schemeClr val="accent1"/>
+          </a:lnRef>
+          <a:fillRef idx="3">
+            <a:schemeClr val="accent1"/>
+          </a:fillRef>
+          <a:effectRef idx="2">
+            <a:schemeClr val="accent1"/>
+          </a:effectRef>
+          <a:fontRef idx="minor">
+            <a:schemeClr val="lt1"/>
+          </a:fontRef>
+        </p:style>
+        <p:txBody>
+          <a:bodyPr rtlCol="0" anchor="ctr" wrap="none" lIns="64000" rIns="64000" tIns="25400" bIns="25400"/>
+          <a:lstStyle/>
+          <a:p>
+            <a:pPr algn="ctr"/>
+            <a:r>
+              <a:rPr sz="1300" b="0">
+                <a:solidFill>
+                  <a:srgbClr val="000000"/>
+                </a:solidFill>
+                <a:latin typeface="Calibri"/>
+              </a:rPr>
+              <a:t>a² = b²+c²–2bc·cosA</a:t>
+            </a:r>
+          </a:p>
+        </p:txBody>
+      </p:sp>
+      <p:cxnSp>
+        <p:nvCxnSpPr>
+          <p:cNvPr id="21" name="Connector 20"/>
+          <p:cNvCxnSpPr/>
+          <p:nvPr/>
+        </p:nvCxnSpPr>
+        <p:spPr>
+          <a:xfrm>
+            <a:off x="7715646" y="2670962"/>
+            <a:ext cx="1402407" cy="526801"/>
+          </a:xfrm>
+          <a:prstGeom prst="line">
+            <a:avLst/>
+          </a:prstGeom>
+          <a:ln w="15875">
+            <a:solidFill>
+              <a:srgbClr val="BF8F00"/>
+            </a:solidFill>
+          </a:ln>
+        </p:spPr>
+        <p:style>
+          <a:lnRef idx="2">
+            <a:schemeClr val="accent1"/>
+          </a:lnRef>
+          <a:fillRef idx="0">
+            <a:schemeClr val="accent1"/>
+          </a:fillRef>
+          <a:effectRef idx="1">
+            <a:schemeClr val="accent1"/>
+          </a:effectRef>
+          <a:fontRef idx="minor">
+            <a:schemeClr val="tx1"/>
+          </a:fontRef>
+        </p:style>
+      </p:cxnSp>
+      <p:sp>
+        <p:nvSpPr>
+          <p:cNvPr id="22" name="Rounded Rectangle 21"/>
+          <p:cNvSpPr/>
+          <p:nvPr/>
+        </p:nvSpPr>
+        <p:spPr>
+          <a:xfrm>
+            <a:off x="9118053" y="3022163"/>
+            <a:ext cx="2260321" cy="351200"/>
+          </a:xfrm>
+          <a:prstGeom prst="roundRect">
+            <a:avLst>
+              <a:gd name="adj" fmla="val 50000"/>
+            </a:avLst>
+          </a:prstGeom>
+          <a:solidFill>
+            <a:srgbClr val="FFF8E1"/>
+          </a:solidFill>
+          <a:ln w="15875">
+            <a:solidFill>
+              <a:srgbClr val="BF8F00"/>
+            </a:solidFill>
+          </a:ln>
+          <a:effectLst/>
+        </p:spPr>
+        <p:style>
+          <a:lnRef idx="1">
+            <a:schemeClr val="accent1"/>
+          </a:lnRef>
+          <a:fillRef idx="3">
+            <a:schemeClr val="accent1"/>
+          </a:fillRef>
+          <a:effectRef idx="2">
+            <a:schemeClr val="accent1"/>
+          </a:effectRef>
+          <a:fontRef idx="minor">
+            <a:schemeClr val="lt1"/>
+          </a:fontRef>
+        </p:style>
+        <p:txBody>
+          <a:bodyPr rtlCol="0" anchor="ctr" wrap="none" lIns="64000" rIns="64000" tIns="25400" bIns="25400"/>
+          <a:lstStyle/>
+          <a:p>
+            <a:pPr algn="ctr"/>
+            <a:r>
+              <a:rPr sz="1300" b="0">
+                <a:solidFill>
+                  <a:srgbClr val="000000"/>
+                </a:solidFill>
+                <a:latin typeface="Calibri"/>
+              </a:rPr>
+              <a:t>cosA = (b²+c²–a²)/(2bc)</a:t>
+            </a:r>
+          </a:p>
+        </p:txBody>
+      </p:sp>
+      <p:sp>
+        <p:nvSpPr>
+          <p:cNvPr id="23" name="Oval 22"/>
+          <p:cNvSpPr/>
+          <p:nvPr/>
+        </p:nvSpPr>
+        <p:spPr>
+          <a:xfrm>
+            <a:off x="6810021" y="2259078"/>
+            <a:ext cx="1811249" cy="823767"/>
+          </a:xfrm>
+          <a:prstGeom prst="ellipse">
+            <a:avLst/>
+          </a:prstGeom>
+          <a:solidFill>
+            <a:srgbClr val="FFF2CC"/>
+          </a:solidFill>
+          <a:ln w="31750">
+            <a:solidFill>
+              <a:srgbClr val="BF8F00"/>
+            </a:solidFill>
+          </a:ln>
+          <a:effectLst/>
+        </p:spPr>
+        <p:style>
+          <a:lnRef idx="1">
+            <a:schemeClr val="accent1"/>
+          </a:lnRef>
+          <a:fillRef idx="3">
+            <a:schemeClr val="accent1"/>
+          </a:fillRef>
+          <a:effectRef idx="2">
+            <a:schemeClr val="accent1"/>
+          </a:effectRef>
+          <a:fontRef idx="minor">
+            <a:schemeClr val="lt1"/>
+          </a:fontRef>
+        </p:style>
+        <p:txBody>
+          <a:bodyPr rtlCol="0" anchor="ctr" wrap="none" lIns="64000" rIns="64000" tIns="25400" bIns="25400"/>
+          <a:lstStyle/>
+          <a:p>
+            <a:pPr algn="ctr"/>
+            <a:r>
+              <a:rPr sz="1500" b="1">
+                <a:solidFill>
+                  <a:srgbClr val="000000"/>
+                </a:solidFill>
+                <a:latin typeface="Calibri"/>
+              </a:rPr>
+              <a:t>Định lí Sin</a:t>
+            </a:r>
+          </a:p>
+          <a:p>
+            <a:pPr algn="ctr"/>
+            <a:r>
+              <a:rPr sz="1500" b="1">
+                <a:solidFill>
+                  <a:srgbClr val="000000"/>
+                </a:solidFill>
+                <a:latin typeface="Calibri"/>
+              </a:rPr>
+              <a:t>&amp; Cosin</a:t>
+            </a:r>
+          </a:p>
+        </p:txBody>
+      </p:sp>
+      <p:cxnSp>
+        <p:nvCxnSpPr>
+          <p:cNvPr id="24" name="Connector 23"/>
+          <p:cNvCxnSpPr/>
+          <p:nvPr/>
+        </p:nvCxnSpPr>
+        <p:spPr>
+          <a:xfrm flipH="1">
+            <a:off x="4338888" y="3954780"/>
+            <a:ext cx="1688379" cy="1283817"/>
+          </a:xfrm>
+          <a:prstGeom prst="line">
+            <a:avLst/>
+          </a:prstGeom>
+          <a:ln w="44450">
+            <a:solidFill>
+              <a:srgbClr val="2F5597"/>
+            </a:solidFill>
+          </a:ln>
+        </p:spPr>
+        <p:style>
+          <a:lnRef idx="2">
+            <a:schemeClr val="accent1"/>
+          </a:lnRef>
+          <a:fillRef idx="0">
+            <a:schemeClr val="accent1"/>
+          </a:fillRef>
+          <a:effectRef idx="1">
+            <a:schemeClr val="accent1"/>
+          </a:effectRef>
+          <a:fontRef idx="minor">
+            <a:schemeClr val="tx1"/>
+          </a:fontRef>
+        </p:style>
+      </p:cxnSp>
+      <p:cxnSp>
+        <p:nvCxnSpPr>
+          <p:cNvPr id="25" name="Connector 24"/>
+          <p:cNvCxnSpPr/>
+          <p:nvPr/>
+        </p:nvCxnSpPr>
+        <p:spPr>
+          <a:xfrm flipH="1" flipV="1">
+            <a:off x="2464295" y="4510374"/>
+            <a:ext cx="1874593" cy="728223"/>
+          </a:xfrm>
+          <a:prstGeom prst="line">
+            <a:avLst/>
+          </a:prstGeom>
+          <a:ln w="15875">
+            <a:solidFill>
+              <a:srgbClr val="2F5597"/>
+            </a:solidFill>
+          </a:ln>
+        </p:spPr>
+        <p:style>
+          <a:lnRef idx="2">
+            <a:schemeClr val="accent1"/>
+          </a:lnRef>
+          <a:fillRef idx="0">
+            <a:schemeClr val="accent1"/>
+          </a:fillRef>
+          <a:effectRef idx="1">
+            <a:schemeClr val="accent1"/>
+          </a:effectRef>
+          <a:fontRef idx="minor">
+            <a:schemeClr val="tx1"/>
+          </a:fontRef>
+        </p:style>
+      </p:cxnSp>
+      <p:sp>
+        <p:nvSpPr>
+          <p:cNvPr id="26" name="Rounded Rectangle 25"/>
+          <p:cNvSpPr/>
+          <p:nvPr/>
+        </p:nvSpPr>
+        <p:spPr>
+          <a:xfrm>
+            <a:off x="1148346" y="4334774"/>
+            <a:ext cx="1315949" cy="351200"/>
+          </a:xfrm>
+          <a:prstGeom prst="roundRect">
+            <a:avLst>
+              <a:gd name="adj" fmla="val 50000"/>
+            </a:avLst>
+          </a:prstGeom>
+          <a:solidFill>
+            <a:srgbClr val="E3EEF9"/>
+          </a:solidFill>
+          <a:ln w="15875">
+            <a:solidFill>
+              <a:srgbClr val="2F5597"/>
+            </a:solidFill>
+          </a:ln>
+          <a:effectLst/>
+        </p:spPr>
+        <p:style>
+          <a:lnRef idx="1">
+            <a:schemeClr val="accent1"/>
+          </a:lnRef>
+          <a:fillRef idx="3">
+            <a:schemeClr val="accent1"/>
+          </a:fillRef>
+          <a:effectRef idx="2">
+            <a:schemeClr val="accent1"/>
+          </a:effectRef>
+          <a:fontRef idx="minor">
+            <a:schemeClr val="lt1"/>
+          </a:fontRef>
+        </p:style>
+        <p:txBody>
+          <a:bodyPr rtlCol="0" anchor="ctr" wrap="none" lIns="64000" rIns="64000" tIns="25400" bIns="25400"/>
+          <a:lstStyle/>
+          <a:p>
+            <a:pPr algn="ctr"/>
+            <a:r>
+              <a:rPr sz="1300" b="0">
+                <a:solidFill>
+                  <a:srgbClr val="000000"/>
+                </a:solidFill>
+                <a:latin typeface="Calibri"/>
+              </a:rPr>
+              <a:t>S = ½bc·sinA</a:t>
+            </a:r>
+          </a:p>
+        </p:txBody>
+      </p:sp>
+      <p:cxnSp>
+        <p:nvCxnSpPr>
+          <p:cNvPr id="27" name="Connector 26"/>
+          <p:cNvCxnSpPr/>
+          <p:nvPr/>
+        </p:nvCxnSpPr>
+        <p:spPr>
+          <a:xfrm flipH="1" flipV="1">
+            <a:off x="2593073" y="5037175"/>
+            <a:ext cx="1745815" cy="201422"/>
+          </a:xfrm>
+          <a:prstGeom prst="line">
+            <a:avLst/>
+          </a:prstGeom>
+          <a:ln w="15875">
+            <a:solidFill>
+              <a:srgbClr val="2F5597"/>
+            </a:solidFill>
+          </a:ln>
+        </p:spPr>
+        <p:style>
+          <a:lnRef idx="2">
+            <a:schemeClr val="accent1"/>
+          </a:lnRef>
+          <a:fillRef idx="0">
+            <a:schemeClr val="accent1"/>
+          </a:fillRef>
+          <a:effectRef idx="1">
+            <a:schemeClr val="accent1"/>
+          </a:effectRef>
+          <a:fontRef idx="minor">
+            <a:schemeClr val="tx1"/>
+          </a:fontRef>
+        </p:style>
+      </p:cxnSp>
+      <p:sp>
+        <p:nvSpPr>
+          <p:cNvPr id="28" name="Rounded Rectangle 27"/>
+          <p:cNvSpPr/>
+          <p:nvPr/>
+        </p:nvSpPr>
+        <p:spPr>
+          <a:xfrm>
+            <a:off x="1019568" y="4760864"/>
+            <a:ext cx="1573505" cy="552622"/>
+          </a:xfrm>
+          <a:prstGeom prst="roundRect">
+            <a:avLst>
+              <a:gd name="adj" fmla="val 50000"/>
+            </a:avLst>
+          </a:prstGeom>
+          <a:solidFill>
+            <a:srgbClr val="E3EEF9"/>
+          </a:solidFill>
+          <a:ln w="15875">
+            <a:solidFill>
+              <a:srgbClr val="2F5597"/>
+            </a:solidFill>
+          </a:ln>
+          <a:effectLst/>
+        </p:spPr>
+        <p:style>
+          <a:lnRef idx="1">
+            <a:schemeClr val="accent1"/>
+          </a:lnRef>
+          <a:fillRef idx="3">
+            <a:schemeClr val="accent1"/>
+          </a:fillRef>
+          <a:effectRef idx="2">
+            <a:schemeClr val="accent1"/>
+          </a:effectRef>
+          <a:fontRef idx="minor">
+            <a:schemeClr val="lt1"/>
+          </a:fontRef>
+        </p:style>
+        <p:txBody>
+          <a:bodyPr rtlCol="0" anchor="ctr" wrap="none" lIns="64000" rIns="64000" tIns="25400" bIns="25400"/>
+          <a:lstStyle/>
+          <a:p>
+            <a:pPr algn="ctr"/>
+            <a:r>
+              <a:rPr sz="1300" b="0">
+                <a:solidFill>
+                  <a:srgbClr val="000000"/>
+                </a:solidFill>
+                <a:latin typeface="Calibri"/>
+              </a:rPr>
+              <a:t>R = a/(2sinA) –</a:t>
+            </a:r>
+          </a:p>
+          <a:p>
+            <a:pPr algn="ctr"/>
+            <a:r>
+              <a:rPr sz="1300" b="0">
+                <a:solidFill>
+                  <a:srgbClr val="000000"/>
+                </a:solidFill>
+                <a:latin typeface="Calibri"/>
+              </a:rPr>
+              <a:t>ngoại tiếp</a:t>
+            </a:r>
+          </a:p>
+        </p:txBody>
+      </p:sp>
+      <p:cxnSp>
+        <p:nvCxnSpPr>
+          <p:cNvPr id="29" name="Connector 28"/>
+          <p:cNvCxnSpPr/>
+          <p:nvPr/>
+        </p:nvCxnSpPr>
+        <p:spPr>
+          <a:xfrm flipH="1">
+            <a:off x="2678925" y="5238597"/>
+            <a:ext cx="1659963" cy="526801"/>
+          </a:xfrm>
+          <a:prstGeom prst="line">
+            <a:avLst/>
+          </a:prstGeom>
+          <a:ln w="15875">
+            <a:solidFill>
+              <a:srgbClr val="2F5597"/>
+            </a:solidFill>
+          </a:ln>
+        </p:spPr>
+        <p:style>
+          <a:lnRef idx="2">
+            <a:schemeClr val="accent1"/>
+          </a:lnRef>
+          <a:fillRef idx="0">
+            <a:schemeClr val="accent1"/>
+          </a:fillRef>
+          <a:effectRef idx="1">
+            <a:schemeClr val="accent1"/>
+          </a:effectRef>
+          <a:fontRef idx="minor">
+            <a:schemeClr val="tx1"/>
+          </a:fontRef>
+        </p:style>
+      </p:cxnSp>
+      <p:sp>
+        <p:nvSpPr>
+          <p:cNvPr id="30" name="Rounded Rectangle 29"/>
+          <p:cNvSpPr/>
+          <p:nvPr/>
+        </p:nvSpPr>
+        <p:spPr>
+          <a:xfrm>
+            <a:off x="933716" y="5388376"/>
+            <a:ext cx="1745209" cy="754044"/>
+          </a:xfrm>
+          <a:prstGeom prst="roundRect">
+            <a:avLst>
+              <a:gd name="adj" fmla="val 50000"/>
+            </a:avLst>
+          </a:prstGeom>
+          <a:solidFill>
+            <a:srgbClr val="E3EEF9"/>
+          </a:solidFill>
+          <a:ln w="15875">
+            <a:solidFill>
+              <a:srgbClr val="2F5597"/>
+            </a:solidFill>
+          </a:ln>
+          <a:effectLst/>
+        </p:spPr>
+        <p:style>
+          <a:lnRef idx="1">
+            <a:schemeClr val="accent1"/>
+          </a:lnRef>
+          <a:fillRef idx="3">
+            <a:schemeClr val="accent1"/>
+          </a:fillRef>
+          <a:effectRef idx="2">
+            <a:schemeClr val="accent1"/>
+          </a:effectRef>
+          <a:fontRef idx="minor">
+            <a:schemeClr val="lt1"/>
+          </a:fontRef>
+        </p:style>
+        <p:txBody>
+          <a:bodyPr rtlCol="0" anchor="ctr" wrap="none" lIns="64000" rIns="64000" tIns="25400" bIns="25400"/>
+          <a:lstStyle/>
+          <a:p>
+            <a:pPr algn="ctr"/>
+            <a:r>
+              <a:rPr sz="1300" b="0">
+                <a:solidFill>
+                  <a:srgbClr val="000000"/>
+                </a:solidFill>
+                <a:latin typeface="Calibri"/>
+              </a:rPr>
+              <a:t>r = S/p; p</a:t>
+            </a:r>
+          </a:p>
+          <a:p>
+            <a:pPr algn="ctr"/>
+            <a:r>
+              <a:rPr sz="1300" b="0">
+                <a:solidFill>
+                  <a:srgbClr val="000000"/>
+                </a:solidFill>
+                <a:latin typeface="Calibri"/>
+              </a:rPr>
+              <a:t>= (a+b+c)/2 – nội</a:t>
+            </a:r>
+          </a:p>
+          <a:p>
+            <a:pPr algn="ctr"/>
+            <a:r>
+              <a:rPr sz="1300" b="0">
+                <a:solidFill>
+                  <a:srgbClr val="000000"/>
+                </a:solidFill>
+                <a:latin typeface="Calibri"/>
+              </a:rPr>
+              <a:t>tiếp</a:t>
+            </a:r>
+          </a:p>
+        </p:txBody>
+      </p:sp>
+      <p:sp>
+        <p:nvSpPr>
+          <p:cNvPr id="31" name="Oval 30"/>
+          <p:cNvSpPr/>
+          <p:nvPr/>
+        </p:nvSpPr>
+        <p:spPr>
+          <a:xfrm>
+            <a:off x="3433264" y="4826713"/>
+            <a:ext cx="1811249" cy="823767"/>
+          </a:xfrm>
+          <a:prstGeom prst="ellipse">
+            <a:avLst/>
+          </a:prstGeom>
+          <a:solidFill>
+            <a:srgbClr val="E2EFDA"/>
+          </a:solidFill>
+          <a:ln w="31750">
+            <a:solidFill>
+              <a:srgbClr val="375623"/>
+            </a:solidFill>
+          </a:ln>
+          <a:effectLst/>
+        </p:spPr>
+        <p:style>
+          <a:lnRef idx="1">
+            <a:schemeClr val="accent1"/>
+          </a:lnRef>
+          <a:fillRef idx="3">
+            <a:schemeClr val="accent1"/>
+          </a:fillRef>
+          <a:effectRef idx="2">
+            <a:schemeClr val="accent1"/>
+          </a:effectRef>
+          <a:fontRef idx="minor">
+            <a:schemeClr val="lt1"/>
+          </a:fontRef>
+        </p:style>
+        <p:txBody>
+          <a:bodyPr rtlCol="0" anchor="ctr" wrap="none" lIns="64000" rIns="64000" tIns="25400" bIns="25400"/>
+          <a:lstStyle/>
+          <a:p>
+            <a:pPr algn="ctr"/>
+            <a:r>
+              <a:rPr sz="1500" b="1">
+                <a:solidFill>
+                  <a:srgbClr val="000000"/>
+                </a:solidFill>
+                <a:latin typeface="Calibri"/>
+              </a:rPr>
+              <a:t>Diện tích &amp;</a:t>
+            </a:r>
+          </a:p>
+          <a:p>
+            <a:pPr algn="ctr"/>
+            <a:r>
+              <a:rPr sz="1500" b="1">
+                <a:solidFill>
+                  <a:srgbClr val="000000"/>
+                </a:solidFill>
+                <a:latin typeface="Calibri"/>
+              </a:rPr>
+              <a:t>R, r</a:t>
+            </a:r>
+          </a:p>
+        </p:txBody>
+      </p:sp>
+      <p:cxnSp>
+        <p:nvCxnSpPr>
+          <p:cNvPr id="32" name="Connector 31"/>
+          <p:cNvCxnSpPr/>
+          <p:nvPr/>
+        </p:nvCxnSpPr>
+        <p:spPr>
+          <a:xfrm>
+            <a:off x="6027267" y="3954780"/>
+            <a:ext cx="1688379" cy="1283817"/>
+          </a:xfrm>
+          <a:prstGeom prst="line">
+            <a:avLst/>
+          </a:prstGeom>
+          <a:ln w="44450">
+            <a:solidFill>
+              <a:srgbClr val="7030A0"/>
+            </a:solidFill>
+          </a:ln>
+        </p:spPr>
+        <p:style>
+          <a:lnRef idx="2">
+            <a:schemeClr val="accent1"/>
+          </a:lnRef>
+          <a:fillRef idx="0">
+            <a:schemeClr val="accent1"/>
+          </a:fillRef>
+          <a:effectRef idx="1">
+            <a:schemeClr val="accent1"/>
+          </a:effectRef>
+          <a:fontRef idx="minor">
+            <a:schemeClr val="tx1"/>
+          </a:fontRef>
+        </p:style>
+      </p:cxnSp>
+      <p:cxnSp>
+        <p:nvCxnSpPr>
+          <p:cNvPr id="33" name="Connector 32"/>
+          <p:cNvCxnSpPr/>
+          <p:nvPr/>
+        </p:nvCxnSpPr>
+        <p:spPr>
+          <a:xfrm flipV="1">
+            <a:off x="7715646" y="4924841"/>
+            <a:ext cx="1702889" cy="313756"/>
+          </a:xfrm>
+          <a:prstGeom prst="line">
+            <a:avLst/>
+          </a:prstGeom>
+          <a:ln w="15875">
+            <a:solidFill>
+              <a:srgbClr val="7030A0"/>
+            </a:solidFill>
+          </a:ln>
+        </p:spPr>
+        <p:style>
+          <a:lnRef idx="2">
+            <a:schemeClr val="accent1"/>
+          </a:lnRef>
+          <a:fillRef idx="0">
+            <a:schemeClr val="accent1"/>
+          </a:fillRef>
+          <a:effectRef idx="1">
+            <a:schemeClr val="accent1"/>
+          </a:effectRef>
+          <a:fontRef idx="minor">
+            <a:schemeClr val="tx1"/>
+          </a:fontRef>
+        </p:style>
+      </p:cxnSp>
+      <p:sp>
+        <p:nvSpPr>
+          <p:cNvPr id="34" name="Rounded Rectangle 33"/>
+          <p:cNvSpPr/>
+          <p:nvPr/>
+        </p:nvSpPr>
+        <p:spPr>
+          <a:xfrm>
+            <a:off x="9418535" y="4547819"/>
+            <a:ext cx="1659357" cy="754044"/>
+          </a:xfrm>
+          <a:prstGeom prst="roundRect">
+            <a:avLst>
+              <a:gd name="adj" fmla="val 50000"/>
+            </a:avLst>
+          </a:prstGeom>
+          <a:solidFill>
+            <a:srgbClr val="F3E8F7"/>
+          </a:solidFill>
+          <a:ln w="15875">
+            <a:solidFill>
+              <a:srgbClr val="7030A0"/>
+            </a:solidFill>
+          </a:ln>
+          <a:effectLst/>
+        </p:spPr>
+        <p:style>
+          <a:lnRef idx="1">
+            <a:schemeClr val="accent1"/>
+          </a:lnRef>
+          <a:fillRef idx="3">
+            <a:schemeClr val="accent1"/>
+          </a:fillRef>
+          <a:effectRef idx="2">
+            <a:schemeClr val="accent1"/>
+          </a:effectRef>
+          <a:fontRef idx="minor">
+            <a:schemeClr val="lt1"/>
+          </a:fontRef>
+        </p:style>
+        <p:txBody>
+          <a:bodyPr rtlCol="0" anchor="ctr" wrap="none" lIns="64000" rIns="64000" tIns="25400" bIns="25400"/>
+          <a:lstStyle/>
+          <a:p>
+            <a:pPr algn="ctr"/>
+            <a:r>
+              <a:rPr sz="1300" b="0">
+                <a:solidFill>
+                  <a:srgbClr val="000000"/>
+                </a:solidFill>
+                <a:latin typeface="Calibri"/>
+              </a:rPr>
+              <a:t>Tính S, R, r</a:t>
+            </a:r>
+          </a:p>
+          <a:p>
+            <a:pPr algn="ctr"/>
+            <a:r>
+              <a:rPr sz="1300" b="0">
+                <a:solidFill>
+                  <a:srgbClr val="000000"/>
+                </a:solidFill>
+                <a:latin typeface="Calibri"/>
+              </a:rPr>
+              <a:t>khi biết 2 cạnh,</a:t>
+            </a:r>
+          </a:p>
+          <a:p>
+            <a:pPr algn="ctr"/>
+            <a:r>
+              <a:rPr sz="1300" b="0">
+                <a:solidFill>
+                  <a:srgbClr val="000000"/>
+                </a:solidFill>
+                <a:latin typeface="Calibri"/>
+              </a:rPr>
+              <a:t>1 góc</a:t>
+            </a:r>
+          </a:p>
+        </p:txBody>
+      </p:sp>
+      <p:cxnSp>
+        <p:nvCxnSpPr>
+          <p:cNvPr id="35" name="Connector 34"/>
+          <p:cNvCxnSpPr/>
+          <p:nvPr/>
+        </p:nvCxnSpPr>
+        <p:spPr>
+          <a:xfrm>
+            <a:off x="7715646" y="5238597"/>
+            <a:ext cx="1531185" cy="414467"/>
+          </a:xfrm>
+          <a:prstGeom prst="line">
+            <a:avLst/>
+          </a:prstGeom>
+          <a:ln w="15875">
+            <a:solidFill>
+              <a:srgbClr val="7030A0"/>
+            </a:solidFill>
+          </a:ln>
+        </p:spPr>
+        <p:style>
+          <a:lnRef idx="2">
+            <a:schemeClr val="accent1"/>
+          </a:lnRef>
+          <a:fillRef idx="0">
+            <a:schemeClr val="accent1"/>
+          </a:fillRef>
+          <a:effectRef idx="1">
+            <a:schemeClr val="accent1"/>
+          </a:effectRef>
+          <a:fontRef idx="minor">
+            <a:schemeClr val="tx1"/>
+          </a:fontRef>
+        </p:style>
+      </p:cxnSp>
+      <p:sp>
+        <p:nvSpPr>
+          <p:cNvPr id="36" name="Rounded Rectangle 35"/>
+          <p:cNvSpPr/>
+          <p:nvPr/>
+        </p:nvSpPr>
+        <p:spPr>
+          <a:xfrm>
+            <a:off x="9246831" y="5376753"/>
+            <a:ext cx="2002765" cy="552622"/>
+          </a:xfrm>
+          <a:prstGeom prst="roundRect">
+            <a:avLst>
+              <a:gd name="adj" fmla="val 50000"/>
+            </a:avLst>
+          </a:prstGeom>
+          <a:solidFill>
+            <a:srgbClr val="F3E8F7"/>
+          </a:solidFill>
+          <a:ln w="15875">
+            <a:solidFill>
+              <a:srgbClr val="7030A0"/>
+            </a:solidFill>
+          </a:ln>
+          <a:effectLst/>
+        </p:spPr>
+        <p:style>
+          <a:lnRef idx="1">
+            <a:schemeClr val="accent1"/>
+          </a:lnRef>
+          <a:fillRef idx="3">
+            <a:schemeClr val="accent1"/>
+          </a:fillRef>
+          <a:effectRef idx="2">
+            <a:schemeClr val="accent1"/>
+          </a:effectRef>
+          <a:fontRef idx="minor">
+            <a:schemeClr val="lt1"/>
+          </a:fontRef>
+        </p:style>
+        <p:txBody>
+          <a:bodyPr rtlCol="0" anchor="ctr" wrap="none" lIns="64000" rIns="64000" tIns="25400" bIns="25400"/>
+          <a:lstStyle/>
+          <a:p>
+            <a:pPr algn="ctr"/>
+            <a:r>
+              <a:rPr sz="1300" b="0">
+                <a:solidFill>
+                  <a:srgbClr val="000000"/>
+                </a:solidFill>
+                <a:latin typeface="Calibri"/>
+              </a:rPr>
+              <a:t>Đo đạc thực tế</a:t>
+            </a:r>
+          </a:p>
+          <a:p>
+            <a:pPr algn="ctr"/>
+            <a:r>
+              <a:rPr sz="1300" b="0">
+                <a:solidFill>
+                  <a:srgbClr val="000000"/>
+                </a:solidFill>
+                <a:latin typeface="Calibri"/>
+              </a:rPr>
+              <a:t>(Bài 3.18, 3.19 SGK)</a:t>
+            </a:r>
+          </a:p>
+        </p:txBody>
+      </p:sp>
+      <p:sp>
+        <p:nvSpPr>
+          <p:cNvPr id="37" name="Oval 36"/>
+          <p:cNvSpPr/>
+          <p:nvPr/>
+        </p:nvSpPr>
+        <p:spPr>
+          <a:xfrm>
+            <a:off x="6601995" y="4826713"/>
+            <a:ext cx="2227301" cy="823767"/>
+          </a:xfrm>
+          <a:prstGeom prst="ellipse">
+            <a:avLst/>
+          </a:prstGeom>
+          <a:solidFill>
+            <a:srgbClr val="FFF2CC"/>
+          </a:solidFill>
+          <a:ln w="31750">
+            <a:solidFill>
+              <a:srgbClr val="BF8F00"/>
+            </a:solidFill>
+          </a:ln>
+          <a:effectLst/>
+        </p:spPr>
+        <p:style>
+          <a:lnRef idx="1">
+            <a:schemeClr val="accent1"/>
+          </a:lnRef>
+          <a:fillRef idx="3">
+            <a:schemeClr val="accent1"/>
+          </a:fillRef>
+          <a:effectRef idx="2">
+            <a:schemeClr val="accent1"/>
+          </a:effectRef>
+          <a:fontRef idx="minor">
+            <a:schemeClr val="lt1"/>
+          </a:fontRef>
+        </p:style>
+        <p:txBody>
+          <a:bodyPr rtlCol="0" anchor="ctr" wrap="none" lIns="64000" rIns="64000" tIns="25400" bIns="25400"/>
+          <a:lstStyle/>
+          <a:p>
+            <a:pPr algn="ctr"/>
+            <a:r>
+              <a:rPr sz="1500" b="1">
+                <a:solidFill>
+                  <a:srgbClr val="000000"/>
+                </a:solidFill>
+                <a:latin typeface="Calibri"/>
+              </a:rPr>
+              <a:t>Bài tập ứng</a:t>
+            </a:r>
+          </a:p>
+          <a:p>
+            <a:pPr algn="ctr"/>
+            <a:r>
+              <a:rPr sz="1500" b="1">
+                <a:solidFill>
+                  <a:srgbClr val="000000"/>
+                </a:solidFill>
+                <a:latin typeface="Calibri"/>
+              </a:rPr>
+              <a:t>dụng thực tiễn</a:t>
+            </a:r>
+          </a:p>
+        </p:txBody>
+      </p:sp>
+      <p:sp>
+        <p:nvSpPr>
+          <p:cNvPr id="38" name="Oval 37"/>
+          <p:cNvSpPr/>
+          <p:nvPr/>
+        </p:nvSpPr>
+        <p:spPr>
+          <a:xfrm>
+            <a:off x="4784178" y="3484793"/>
+            <a:ext cx="2486178" cy="939972"/>
+          </a:xfrm>
+          <a:prstGeom prst="ellipse">
+            <a:avLst/>
+          </a:prstGeom>
+          <a:solidFill>
+            <a:srgbClr val="002060"/>
+          </a:solidFill>
+          <a:ln w="25400">
+            <a:solidFill>
+              <a:srgbClr val="000B1E"/>
+            </a:solidFill>
+          </a:ln>
+          <a:effectLst/>
+        </p:spPr>
+        <p:style>
+          <a:lnRef idx="1">
+            <a:schemeClr val="accent1"/>
+          </a:lnRef>
+          <a:fillRef idx="3">
+            <a:schemeClr val="accent1"/>
+          </a:fillRef>
+          <a:effectRef idx="2">
+            <a:schemeClr val="accent1"/>
+          </a:effectRef>
+          <a:fontRef idx="minor">
+            <a:schemeClr val="lt1"/>
+          </a:fontRef>
+        </p:style>
+        <p:txBody>
+          <a:bodyPr rtlCol="0" anchor="ctr" wrap="none" lIns="64000" rIns="64000" tIns="25400" bIns="25400"/>
+          <a:lstStyle/>
+          <a:p>
+            <a:pPr algn="ctr"/>
+            <a:r>
+              <a:rPr sz="1700" b="1">
+                <a:solidFill>
+                  <a:srgbClr val="FFFFFF"/>
+                </a:solidFill>
+                <a:latin typeface="Calibri"/>
+              </a:rPr>
+              <a:t>HỆ THỨC LƯỢNG</a:t>
+            </a:r>
+          </a:p>
+          <a:p>
+            <a:pPr algn="ctr"/>
+            <a:r>
+              <a:rPr sz="1700" b="1">
+                <a:solidFill>
+                  <a:srgbClr val="FFFFFF"/>
+                </a:solidFill>
+                <a:latin typeface="Calibri"/>
+              </a:rPr>
+              <a:t>TRONG TAM GIÁC</a:t>
             </a:r>
           </a:p>
         </p:txBody>
@@ -24010,7 +25614,7 @@
                 </a:solidFill>
                 <a:latin typeface="Arial"/>
               </a:rPr>
-              <a:t>HĐ 3. VẬN DỤNG – ĐO ĐẠC THỰC TẾ VĨNH THẠNH</a:t>
+              <a:t>HĐ 3. VẬN DỤNG – ĐO ĐẠC THỰC TẾ ĐỊA PHƯƠNG</a:t>
             </a:r>
           </a:p>
         </p:txBody>
@@ -24206,7 +25810,7 @@
                 </a:solidFill>
                 <a:latin typeface="Arial"/>
               </a:rPr>
-              <a:t>VẬN DỤNG: ĐO DIỆN TÍCH – VĨNH THẠNH</a:t>
+              <a:t>VẬN DỤNG: ĐO DIỆN TÍCH – ĐỊA PHƯƠNG</a:t>
             </a:r>
           </a:p>
         </p:txBody>
@@ -24329,7 +25933,7 @@
                 </a:solidFill>
                 <a:latin typeface="Calibri"/>
               </a:rPr>
-              <a:t>Người dân xã Vĩnh Thạnh cần đo diện tích thửa đất tam giác có hai cạnh 80 m và 60 m, góc kẹp 75°.</a:t>
+              <a:t>Người dân xã địa phương cần đo diện tích thửa đất tam giác có hai cạnh 80 m và 60 m, góc kẹp 75°.</a:t>
             </a:r>
           </a:p>
           <a:p>
@@ -25077,7 +26681,7 @@
                 </a:solidFill>
                 <a:latin typeface="Arial"/>
               </a:rPr>
-              <a:t>VẬN DỤNG: ĐO DIỆN TÍCH – VĨNH THẠNH</a:t>
+              <a:t>VẬN DỤNG: ĐO DIỆN TÍCH – ĐỊA PHƯƠNG</a:t>
             </a:r>
           </a:p>
         </p:txBody>
